--- a/dist/초2/환경·생태/자원과실천/초2_환경·생태_자원과실천_01_쓰레기줄이기와분리배출_학생용.pptx
+++ b/dist/초2/환경·생태/자원과실천/초2_환경·생태_자원과실천_01_쓰레기줄이기와분리배출_학생용.pptx
@@ -115,41 +115,41 @@
   <p:extLst>
     <p:ext uri="{521415D9-36F7-43E2-AB2F-B90AF26B5E84}">
       <p14:sectionLst xmlns:p14="http://schemas.microsoft.com/office/powerpoint/2010/main">
-        <p14:section name="도입" id="{f87e64be-de57-3b08-ec27-c58dcbaa74e4}">
+        <p14:section name="도입" id="{e42ed48f-011c-966d-3d87-cc1e14bff929}">
           <p14:sldIdLst>
             <p14:sldId id="256"/>
             <p14:sldId id="257"/>
           </p14:sldIdLst>
         </p14:section>
-        <p14:section name="개념" id="{d3e6d9a2-ebc3-785a-ae4b-c5a06cd15f43}">
+        <p14:section name="개념" id="{3ee07494-8908-26f5-3bf1-24e3ab2a6629}">
           <p14:sldIdLst>
             <p14:sldId id="258"/>
             <p14:sldId id="260"/>
           </p14:sldIdLst>
         </p14:section>
-        <p14:section name="연습" id="{1e161755-7d16-ff6c-3f11-c14f50d89a19}">
+        <p14:section name="연습" id="{6dff6264-8ad6-9506-f2fb-22a105dc97aa}">
           <p14:sldIdLst>
             <p14:sldId id="259"/>
             <p14:sldId id="261"/>
           </p14:sldIdLst>
         </p14:section>
-        <p14:section name="개념" id="{efefe486-35b6-c875-358c-098ce4685f7e}">
+        <p14:section name="개념" id="{6150d1c9-5875-66c0-12ea-6a90eed46881}">
           <p14:sldIdLst/>
         </p14:section>
-        <p14:section name="연습" id="{4c7b210e-2cef-ce8d-c60c-01214a91e81e}">
+        <p14:section name="연습" id="{8798cb4f-c9de-b7cc-0ad5-0c3f1400d232}">
           <p14:sldIdLst/>
         </p14:section>
-        <p14:section name="확인" id="{79d25d43-c0b7-a4dd-f00f-7845b62ad563}">
+        <p14:section name="확인" id="{3c122049-3e2b-a301-cd74-dc87e14b6b99}">
           <p14:sldIdLst>
             <p14:sldId id="262"/>
           </p14:sldIdLst>
         </p14:section>
-        <p14:section name="정리" id="{a403999c-e372-af4b-2abc-2d7655e76ccd}">
+        <p14:section name="정리" id="{9ee83566-0d5e-4a9c-0ec0-522bbe019e24}">
           <p14:sldIdLst>
             <p14:sldId id="263"/>
           </p14:sldIdLst>
         </p14:section>
-        <p14:section name="보충" id="{c0d8014d-54e5-b531-fc52-46398c73184d}">
+        <p14:section name="보충" id="{996629ec-478c-91b8-5d94-280fed87544d}">
           <p14:sldIdLst>
             <p14:sldId id="264"/>
           </p14:sldIdLst>
